--- a/library/seminars/sem-06/rendered/sem-06-n36.pptx
+++ b/library/seminars/sem-06/rendered/sem-06-n36.pptx
@@ -502,49 +502,73 @@
           <a:lstStyle/>
           <a:p>
             <a:r>
-              <a:t>Прежде чем разбирать первый кейс — одна вещь, которая нужна во всех трёх разборах этой ступени. Отдельная роль — это процесс со своим контекстным окном, вызываемый на одну задачу. Вызывают его по имени явно, либо модель выбирает сама — по описанию роли, не по её названию. Задача приходит текстом, роль возвращает только итог: ни какие файлы она открыла, ни какие запросы сделала, родитель не видит. И последнее: список инструментов определяет, что роль может сделать физически. Если список не указан вовсе, роль получает все инструменты, доступные субагентам, без исключений.</a:t>
+              <a:t>Сразу разведём два слова, которые дальше всё время стоят рядом.</a:t>
             </a:r>
           </a:p>
           <a:p/>
           <a:p>
             <a:r>
-              <a:t>Приём, о котором говорим, не привязан к одному инструменту: отдельная роль со своим контекстным окном есть у нескольких продуктов. Запись при этом у каждого своя: где-то это markdown с инструкцией телом файла, у одного — формат с отдельным полем для инструкции. Общей спецификации нет ни у одного.</a:t>
+              <a:t>Агент — то, что работает в вашей сессии и с чем вы разговариваете. Роль (в документации — субагент) — отдельный исполнитель, которого агент зовёт под одну задачу.</a:t>
             </a:r>
           </a:p>
           <a:p/>
           <a:p>
             <a:r>
-              <a:t>Если спросят, зачем называть переносимость здесь, до разбора кейсов: чтобы не прозвучало как универсальный стандарт раньше времени — весь материал ступени привязан к конкретному продукту, и это стоит сказать сразу, не оговоркой потом.</a:t>
+              <a:t>Верхний ярус вы уже считали в прошлом блоке — те же четыре статьи. Системная часть от харнесса, файлы инструкций проекта, описания всех подключённых серверов целиком и четвёртое — разговор: задача, ответы агента и содержимое каждого прочитанного файла. Первые три вы не выбирали; четвёртое растёт с каждым открытым файлом. Здесь он нужен затем, чтобы сравнить два контекста.</a:t>
             </a:r>
           </a:p>
           <a:p/>
           <a:p>
             <a:r>
-              <a:t>Если спросят про исключение «форк»: есть режим, который наследует всё целиком — тот же промпт, те же права, всю историю; в нашей сцене мы им не пользуемся, но путать его с обычным вызовом не стоит.</a:t>
+              <a:t>Нижний ярус — кто этот контекст держит. Слева ваша рабочая сессия: здесь лежит правка, сюда же нужен результат чтения. В середине роль: контекст свой, те же три верхние полосы, а вместо разговора — задача текстом. Сорок файлов лягут туда и закроются вместе с ролью, обратно уйдёт только итог — сам, без вашего участия.</a:t>
             </a:r>
           </a:p>
           <a:p/>
           <a:p>
             <a:r>
-              <a:t>Если спросят, кто решает, когда вызывать роль по имени, а когда дать модели выбрать самой: оба способа реальны — явный вызов снимает вопрос маршрутизации полностью, выбор моделью зависит от того, насколько точно описание роли называет задачу.</a:t>
+              <a:t>Справа — вторая сессия. Контекст у неё тоже свой, и рабочий остаётся чистым. Но обратного канала нет: ответ переносите вы, руками и своим пересказом.</a:t>
             </a:r>
           </a:p>
           <a:p/>
           <a:p>
             <a:r>
-              <a:t>Если спросят, чем это отличается от нового чата в соседнем окне: окно у нового чата тоже своё, и этим сходство кончается. Роль зовут изнутри сессии, итог возвращается в неё сам, переносить руками нечего. Поведение роли задано файлом, поэтому второй вызов повторяет первый. И права у неё можно урезать списком — у соседнего окна списка прав нет.</a:t>
+              <a:t>Если спросят, сколько ролей можно позвать: агент один, ролей он зовёт столько, сколько нужно; предел — в кейсе параллелизма.</a:t>
             </a:r>
           </a:p>
           <a:p/>
           <a:p>
             <a:r>
-              <a:t>Если спросят, помнит ли роль прошлый вызов: не помнит. Каждый вызов поднимает своё окно с нуля, между вызовами не переносится ничего. Это то же свойство, из которого кейс получает свою пользу, прочитанное с другой стороны: окно одноразовое, и поэтому чистое.</a:t>
+              <a:t>Если спросят, чем роль отличается от второй сессии по существу: тремя вещами, и все три на схеме. Итог возвращается сам, в тот контекст, где лежит работа. Поведение роли задано файлом, поэтому второй вызов повторяет первый. И права роли можно урезать списком — у второй сессии списка прав нет.</a:t>
             </a:r>
           </a:p>
           <a:p/>
           <a:p>
             <a:r>
-              <a:t>Если спросят, какая из трёх строк таблицы важнее для сегодняшнего кейса: вторая. Именно из «возвращается только итог» следует, что окно вызывающей сессии остаётся свободным, сколько бы файлов роль ни открыла. Первая строка понадобится третьему кейсу, третья — ему же, когда права будем собирать руками.</a:t>
+              <a:t>Если спросят, зачем повторять верхний ярус, если его считали в блоке MCP: затем, что следующий ярус читается только рядом с ним — контекст роли собран из тех же статей, и видно это, только когда обе картинки стоят на одном экране.</a:t>
+            </a:r>
+          </a:p>
+          <a:p/>
+          <a:p>
+            <a:r>
+              <a:t>Если спросят, почему полосы верхнего яруса одинаковой ширины: потому что измеренной доли у нас нет. Постоянную плату за подключённые серверы занятие измерило в прошлом блоке, в токенах; остальные три источника на выборке никто не мерил. Нарисовать шкалу с долями было бы проще и было бы враньём.</a:t>
+            </a:r>
+          </a:p>
+          <a:p/>
+          <a:p>
+            <a:r>
+              <a:t>Если спросят, кто решает, звать роль по имени или дать модели выбрать самой: оба способа реальны, и устройство вызова — следующий экран целиком. Явный вызов снимает вопрос маршрутизации; выбор моделью зависит от того, насколько точно описание роли называет задачу.</a:t>
+            </a:r>
+          </a:p>
+          <a:p/>
+          <a:p>
+            <a:r>
+              <a:t>Если спросят, помнит ли роль прошлый вызов: не помнит. Каждый вызов поднимает контекст с нуля, между вызовами не переносится ничего. Это то же свойство, из которого первый кейс получает свою пользу, прочитанное с другой стороны: контекст одноразовый и потому чистый.</a:t>
+            </a:r>
+          </a:p>
+          <a:p/>
+          <a:p>
+            <a:r>
+              <a:t>Если спросят, какая часть схемы важнее для сегодняшнего кейса: золотая стрелка. Именно из «итог возвращается сам, туда, где лежит работа» следует всё, что мы будем считать через три экрана.</a:t>
             </a:r>
           </a:p>
         </p:txBody>
@@ -3595,840 +3619,38 @@
                 </a:solidFill>
                 <a:latin typeface="Arial"/>
               </a:rPr>
-              <a:t>Процесс, контекстное окно, список инструментов</a:t>
-            </a:r>
-          </a:p>
-        </p:txBody>
-      </p:sp>
-      <p:sp>
-        <p:nvSpPr>
-          <p:cNvPr id="3" name="Rectangle 2"/>
-          <p:cNvSpPr/>
+              <a:t>Агент, роль и контекст каждого</a:t>
+            </a:r>
+          </a:p>
+        </p:txBody>
+      </p:sp>
+      <p:pic>
+        <p:nvPicPr>
+          <p:cNvPr id="3" name="Picture 2" descr="subagent-n36-kontekst-i-roli.png"/>
+          <p:cNvPicPr>
+            <a:picLocks noChangeAspect="1"/>
+          </p:cNvPicPr>
           <p:nvPr/>
-        </p:nvSpPr>
+        </p:nvPicPr>
+        <p:blipFill>
+          <a:blip r:embed="rId2"/>
+          <a:stretch>
+            <a:fillRect/>
+          </a:stretch>
+        </p:blipFill>
         <p:spPr>
           <a:xfrm>
-            <a:off x="502920" y="1049178"/>
-            <a:ext cx="5381244" cy="45720"/>
+            <a:off x="572125" y="943356"/>
+            <a:ext cx="11044701" cy="5384292"/>
           </a:xfrm>
           <a:prstGeom prst="rect">
             <a:avLst/>
           </a:prstGeom>
-          <a:solidFill>
-            <a:srgbClr val="065A82"/>
-          </a:solidFill>
-          <a:ln>
-            <a:noFill/>
-          </a:ln>
-          <a:effectLst/>
         </p:spPr>
-        <p:style>
-          <a:lnRef idx="1">
-            <a:schemeClr val="accent1"/>
-          </a:lnRef>
-          <a:fillRef idx="3">
-            <a:schemeClr val="accent1"/>
-          </a:fillRef>
-          <a:effectRef idx="2">
-            <a:schemeClr val="accent1"/>
-          </a:effectRef>
-          <a:fontRef idx="minor">
-            <a:schemeClr val="lt1"/>
-          </a:fontRef>
-        </p:style>
-        <p:txBody>
-          <a:bodyPr rtlCol="0" anchor="ctr"/>
-          <a:lstStyle/>
-          <a:p>
-            <a:pPr algn="ctr"/>
-          </a:p>
-        </p:txBody>
-      </p:sp>
-      <p:sp>
-        <p:nvSpPr>
-          <p:cNvPr id="4" name="Rectangle 3"/>
-          <p:cNvSpPr/>
-          <p:nvPr/>
-        </p:nvSpPr>
-        <p:spPr>
-          <a:xfrm>
-            <a:off x="6304788" y="1049178"/>
-            <a:ext cx="5381244" cy="45720"/>
-          </a:xfrm>
-          <a:prstGeom prst="rect">
-            <a:avLst/>
-          </a:prstGeom>
-          <a:solidFill>
-            <a:srgbClr val="F0AB00"/>
-          </a:solidFill>
-          <a:ln>
-            <a:noFill/>
-          </a:ln>
-          <a:effectLst/>
-        </p:spPr>
-        <p:style>
-          <a:lnRef idx="1">
-            <a:schemeClr val="accent1"/>
-          </a:lnRef>
-          <a:fillRef idx="3">
-            <a:schemeClr val="accent1"/>
-          </a:fillRef>
-          <a:effectRef idx="2">
-            <a:schemeClr val="accent1"/>
-          </a:effectRef>
-          <a:fontRef idx="minor">
-            <a:schemeClr val="lt1"/>
-          </a:fontRef>
-        </p:style>
-        <p:txBody>
-          <a:bodyPr rtlCol="0" anchor="ctr"/>
-          <a:lstStyle/>
-          <a:p>
-            <a:pPr algn="ctr"/>
-          </a:p>
-        </p:txBody>
-      </p:sp>
-      <p:sp>
-        <p:nvSpPr>
-          <p:cNvPr id="5" name="TextBox 4"/>
-          <p:cNvSpPr txBox="1"/>
-          <p:nvPr/>
-        </p:nvSpPr>
-        <p:spPr>
-          <a:xfrm>
-            <a:off x="502920" y="1177194"/>
-            <a:ext cx="5381244" cy="256032"/>
-          </a:xfrm>
-          <a:prstGeom prst="rect">
-            <a:avLst/>
-          </a:prstGeom>
-          <a:noFill/>
-        </p:spPr>
-        <p:txBody>
-          <a:bodyPr wrap="square" lIns="0" rIns="0" tIns="0" bIns="0" anchor="t">
-            <a:spAutoFit/>
-          </a:bodyPr>
-          <a:lstStyle/>
-          <a:p>
-            <a:pPr algn="l">
-              <a:lnSpc>
-                <a:spcPts val="1356"/>
-              </a:lnSpc>
-              <a:spcAft>
-                <a:spcPts val="0"/>
-              </a:spcAft>
-            </a:pPr>
-            <a:r>
-              <a:rPr sz="1150" b="1" i="0">
-                <a:solidFill>
-                  <a:srgbClr val="065A82"/>
-                </a:solidFill>
-                <a:latin typeface="Arial"/>
-              </a:rPr>
-              <a:t>БАЗА</a:t>
-            </a:r>
-          </a:p>
-        </p:txBody>
-      </p:sp>
-      <p:sp>
-        <p:nvSpPr>
-          <p:cNvPr id="6" name="TextBox 5"/>
-          <p:cNvSpPr txBox="1"/>
-          <p:nvPr/>
-        </p:nvSpPr>
-        <p:spPr>
-          <a:xfrm>
-            <a:off x="6304788" y="1177194"/>
-            <a:ext cx="5381244" cy="256032"/>
-          </a:xfrm>
-          <a:prstGeom prst="rect">
-            <a:avLst/>
-          </a:prstGeom>
-          <a:noFill/>
-        </p:spPr>
-        <p:txBody>
-          <a:bodyPr wrap="square" lIns="0" rIns="0" tIns="0" bIns="0" anchor="t">
-            <a:spAutoFit/>
-          </a:bodyPr>
-          <a:lstStyle/>
-          <a:p>
-            <a:pPr algn="l">
-              <a:lnSpc>
-                <a:spcPts val="1356"/>
-              </a:lnSpc>
-              <a:spcAft>
-                <a:spcPts val="0"/>
-              </a:spcAft>
-            </a:pPr>
-            <a:r>
-              <a:rPr sz="1150" b="1" i="0">
-                <a:solidFill>
-                  <a:srgbClr val="8A6200"/>
-                </a:solidFill>
-                <a:latin typeface="Arial"/>
-              </a:rPr>
-              <a:t>ЧТО РЕШАЕТ ИСХОД</a:t>
-            </a:r>
-          </a:p>
-        </p:txBody>
-      </p:sp>
-      <p:sp>
-        <p:nvSpPr>
-          <p:cNvPr id="7" name="Rectangle 6"/>
-          <p:cNvSpPr/>
-          <p:nvPr/>
-        </p:nvSpPr>
-        <p:spPr>
-          <a:xfrm>
-            <a:off x="6090818" y="1049178"/>
-            <a:ext cx="7315" cy="3915155"/>
-          </a:xfrm>
-          <a:prstGeom prst="rect">
-            <a:avLst/>
-          </a:prstGeom>
-          <a:solidFill>
-            <a:srgbClr val="E5EAF0"/>
-          </a:solidFill>
-          <a:ln>
-            <a:noFill/>
-          </a:ln>
-          <a:effectLst/>
-        </p:spPr>
-        <p:style>
-          <a:lnRef idx="1">
-            <a:schemeClr val="accent1"/>
-          </a:lnRef>
-          <a:fillRef idx="3">
-            <a:schemeClr val="accent1"/>
-          </a:fillRef>
-          <a:effectRef idx="2">
-            <a:schemeClr val="accent1"/>
-          </a:effectRef>
-          <a:fontRef idx="minor">
-            <a:schemeClr val="lt1"/>
-          </a:fontRef>
-        </p:style>
-        <p:txBody>
-          <a:bodyPr rtlCol="0" anchor="ctr"/>
-          <a:lstStyle/>
-          <a:p>
-            <a:pPr algn="ctr"/>
-          </a:p>
-        </p:txBody>
-      </p:sp>
-      <p:sp>
-        <p:nvSpPr>
-          <p:cNvPr id="8" name="Rectangle 7"/>
-          <p:cNvSpPr/>
-          <p:nvPr/>
-        </p:nvSpPr>
-        <p:spPr>
-          <a:xfrm>
-            <a:off x="6048756" y="1049178"/>
-            <a:ext cx="91440" cy="91440"/>
-          </a:xfrm>
-          <a:prstGeom prst="rect">
-            <a:avLst/>
-          </a:prstGeom>
-          <a:solidFill>
-            <a:srgbClr val="F0AB00"/>
-          </a:solidFill>
-          <a:ln>
-            <a:noFill/>
-          </a:ln>
-          <a:effectLst/>
-        </p:spPr>
-        <p:style>
-          <a:lnRef idx="1">
-            <a:schemeClr val="accent1"/>
-          </a:lnRef>
-          <a:fillRef idx="3">
-            <a:schemeClr val="accent1"/>
-          </a:fillRef>
-          <a:effectRef idx="2">
-            <a:schemeClr val="accent1"/>
-          </a:effectRef>
-          <a:fontRef idx="minor">
-            <a:schemeClr val="lt1"/>
-          </a:fontRef>
-        </p:style>
-        <p:txBody>
-          <a:bodyPr rtlCol="0" anchor="ctr"/>
-          <a:lstStyle/>
-          <a:p>
-            <a:pPr algn="ctr"/>
-          </a:p>
-        </p:txBody>
-      </p:sp>
-      <p:sp>
-        <p:nvSpPr>
-          <p:cNvPr id="9" name="TextBox 8"/>
-          <p:cNvSpPr txBox="1"/>
-          <p:nvPr/>
-        </p:nvSpPr>
-        <p:spPr>
-          <a:xfrm>
-            <a:off x="502920" y="1561242"/>
-            <a:ext cx="5381244" cy="3403092"/>
-          </a:xfrm>
-          <a:prstGeom prst="rect">
-            <a:avLst/>
-          </a:prstGeom>
-          <a:noFill/>
-        </p:spPr>
-        <p:txBody>
-          <a:bodyPr wrap="square" lIns="0" rIns="0" tIns="0" bIns="0" anchor="t">
-            <a:spAutoFit/>
-          </a:bodyPr>
-          <a:lstStyle/>
-          <a:p>
-            <a:pPr algn="l">
-              <a:lnSpc>
-                <a:spcPts val="2340"/>
-              </a:lnSpc>
-              <a:spcAft>
-                <a:spcPts val="600"/>
-              </a:spcAft>
-            </a:pPr>
-            <a:r>
-              <a:rPr sz="1800" b="0" i="0">
-                <a:solidFill>
-                  <a:srgbClr val="141B2E"/>
-                </a:solidFill>
-                <a:latin typeface="Arial"/>
-              </a:rPr>
-              <a:t>Субагент — отдельный процесс со своим контекстным окном, вызываемый на одну задачу.</a:t>
-            </a:r>
-          </a:p>
-          <a:p>
-            <a:pPr algn="l">
-              <a:lnSpc>
-                <a:spcPts val="2340"/>
-              </a:lnSpc>
-              <a:spcAft>
-                <a:spcPts val="600"/>
-              </a:spcAft>
-            </a:pPr>
-            <a:r>
-              <a:rPr sz="1800" b="0" i="0">
-                <a:solidFill>
-                  <a:srgbClr val="141B2E"/>
-                </a:solidFill>
-                <a:latin typeface="Arial"/>
-              </a:rPr>
-              <a:t>Задача приходит текстом, роль возвращает родителю только итог.</a:t>
-            </a:r>
-          </a:p>
-          <a:p>
-            <a:pPr algn="l">
-              <a:lnSpc>
-                <a:spcPts val="2340"/>
-              </a:lnSpc>
-              <a:spcAft>
-                <a:spcPts val="600"/>
-              </a:spcAft>
-            </a:pPr>
-            <a:r>
-              <a:rPr sz="1800" b="0" i="0">
-                <a:solidFill>
-                  <a:srgbClr val="141B2E"/>
-                </a:solidFill>
-                <a:latin typeface="Arial"/>
-              </a:rPr>
-              <a:t>Список инструментов определяет, что роль может сделать физически.</a:t>
-            </a:r>
-          </a:p>
-        </p:txBody>
-      </p:sp>
-      <p:sp>
-        <p:nvSpPr>
-          <p:cNvPr id="10" name="TextBox 9"/>
-          <p:cNvSpPr txBox="1"/>
-          <p:nvPr/>
-        </p:nvSpPr>
-        <p:spPr>
-          <a:xfrm>
-            <a:off x="6304788" y="1561242"/>
-            <a:ext cx="5381244" cy="2827020"/>
-          </a:xfrm>
-          <a:prstGeom prst="rect">
-            <a:avLst/>
-          </a:prstGeom>
-          <a:noFill/>
-        </p:spPr>
-        <p:txBody>
-          <a:bodyPr wrap="square" lIns="0" rIns="0" tIns="0" bIns="0" anchor="t">
-            <a:spAutoFit/>
-          </a:bodyPr>
-          <a:lstStyle/>
-          <a:p>
-            <a:pPr algn="l">
-              <a:lnSpc>
-                <a:spcPts val="2340"/>
-              </a:lnSpc>
-              <a:spcAft>
-                <a:spcPts val="600"/>
-              </a:spcAft>
-            </a:pPr>
-            <a:r>
-              <a:rPr sz="1800" b="0" i="0">
-                <a:solidFill>
-                  <a:srgbClr val="141B2E"/>
-                </a:solidFill>
-                <a:latin typeface="Arial"/>
-              </a:rPr>
-              <a:t>Вызывает его по имени явно либо модель выбирает сама по описанию — решает описание роли, не её название.</a:t>
-            </a:r>
-          </a:p>
-          <a:p>
-            <a:pPr algn="l">
-              <a:lnSpc>
-                <a:spcPts val="2340"/>
-              </a:lnSpc>
-              <a:spcAft>
-                <a:spcPts val="600"/>
-              </a:spcAft>
-            </a:pPr>
-            <a:r>
-              <a:rPr sz="1800" b="0" i="0">
-                <a:solidFill>
-                  <a:srgbClr val="141B2E"/>
-                </a:solidFill>
-                <a:latin typeface="Arial"/>
-              </a:rPr>
-              <a:t>Промежуточных действий родитель не видит: ни какие файлы открыты, ни какие запросы сделаны.</a:t>
-            </a:r>
-          </a:p>
-          <a:p>
-            <a:pPr algn="l">
-              <a:lnSpc>
-                <a:spcPts val="2340"/>
-              </a:lnSpc>
-              <a:spcAft>
-                <a:spcPts val="600"/>
-              </a:spcAft>
-            </a:pPr>
-            <a:r>
-              <a:rPr sz="1800" b="0" i="0">
-                <a:solidFill>
-                  <a:srgbClr val="141B2E"/>
-                </a:solidFill>
-                <a:latin typeface="Arial"/>
-              </a:rPr>
-              <a:t>Если список не указан вовсе, роль получает все инструменты, доступные субагентам, без исключений.</a:t>
-            </a:r>
-          </a:p>
-        </p:txBody>
-      </p:sp>
-      <p:sp>
-        <p:nvSpPr>
-          <p:cNvPr id="11" name="Rounded Rectangle 10"/>
-          <p:cNvSpPr/>
-          <p:nvPr/>
-        </p:nvSpPr>
-        <p:spPr>
-          <a:xfrm>
-            <a:off x="502920" y="4031646"/>
-            <a:ext cx="1262066" cy="402336"/>
-          </a:xfrm>
-          <a:prstGeom prst="roundRect">
-            <a:avLst>
-              <a:gd name="adj" fmla="val 25000"/>
-            </a:avLst>
-          </a:prstGeom>
-          <a:solidFill>
-            <a:srgbClr val="E0F1F2"/>
-          </a:solidFill>
-          <a:ln w="15240">
-            <a:solidFill>
-              <a:srgbClr val="028090"/>
-            </a:solidFill>
-          </a:ln>
-          <a:effectLst/>
-        </p:spPr>
-        <p:style>
-          <a:lnRef idx="1">
-            <a:schemeClr val="accent1"/>
-          </a:lnRef>
-          <a:fillRef idx="3">
-            <a:schemeClr val="accent1"/>
-          </a:fillRef>
-          <a:effectRef idx="2">
-            <a:schemeClr val="accent1"/>
-          </a:effectRef>
-          <a:fontRef idx="minor">
-            <a:schemeClr val="lt1"/>
-          </a:fontRef>
-        </p:style>
-        <p:txBody>
-          <a:bodyPr rtlCol="0" anchor="ctr"/>
-          <a:lstStyle/>
-          <a:p>
-            <a:pPr algn="ctr"/>
-          </a:p>
-        </p:txBody>
-      </p:sp>
-      <p:sp>
-        <p:nvSpPr>
-          <p:cNvPr id="12" name="TextBox 11"/>
-          <p:cNvSpPr txBox="1"/>
-          <p:nvPr/>
-        </p:nvSpPr>
-        <p:spPr>
-          <a:xfrm>
-            <a:off x="502920" y="4031646"/>
-            <a:ext cx="1262066" cy="402336"/>
-          </a:xfrm>
-          <a:prstGeom prst="rect">
-            <a:avLst/>
-          </a:prstGeom>
-          <a:noFill/>
-        </p:spPr>
-        <p:txBody>
-          <a:bodyPr wrap="square" lIns="0" rIns="0" tIns="0" bIns="0" anchor="ctr">
-            <a:spAutoFit/>
-          </a:bodyPr>
-          <a:lstStyle/>
-          <a:p>
-            <a:pPr algn="ctr">
-              <a:lnSpc>
-                <a:spcPts val="1475"/>
-              </a:lnSpc>
-              <a:spcAft>
-                <a:spcPts val="0"/>
-              </a:spcAft>
-            </a:pPr>
-            <a:r>
-              <a:rPr sz="1250" b="1" i="0">
-                <a:solidFill>
-                  <a:srgbClr val="065A82"/>
-                </a:solidFill>
-                <a:latin typeface="Arial"/>
-              </a:rPr>
-              <a:t>описание</a:t>
-            </a:r>
-          </a:p>
-        </p:txBody>
-      </p:sp>
-      <p:sp>
-        <p:nvSpPr>
-          <p:cNvPr id="13" name="Rounded Rectangle 12"/>
-          <p:cNvSpPr/>
-          <p:nvPr/>
-        </p:nvSpPr>
-        <p:spPr>
-          <a:xfrm>
-            <a:off x="1893002" y="4031646"/>
-            <a:ext cx="2039544" cy="402336"/>
-          </a:xfrm>
-          <a:prstGeom prst="roundRect">
-            <a:avLst>
-              <a:gd name="adj" fmla="val 25000"/>
-            </a:avLst>
-          </a:prstGeom>
-          <a:solidFill>
-            <a:srgbClr val="E0F1F2"/>
-          </a:solidFill>
-          <a:ln w="15240">
-            <a:solidFill>
-              <a:srgbClr val="028090"/>
-            </a:solidFill>
-          </a:ln>
-          <a:effectLst/>
-        </p:spPr>
-        <p:style>
-          <a:lnRef idx="1">
-            <a:schemeClr val="accent1"/>
-          </a:lnRef>
-          <a:fillRef idx="3">
-            <a:schemeClr val="accent1"/>
-          </a:fillRef>
-          <a:effectRef idx="2">
-            <a:schemeClr val="accent1"/>
-          </a:effectRef>
-          <a:fontRef idx="minor">
-            <a:schemeClr val="lt1"/>
-          </a:fontRef>
-        </p:style>
-        <p:txBody>
-          <a:bodyPr rtlCol="0" anchor="ctr"/>
-          <a:lstStyle/>
-          <a:p>
-            <a:pPr algn="ctr"/>
-          </a:p>
-        </p:txBody>
-      </p:sp>
-      <p:sp>
-        <p:nvSpPr>
-          <p:cNvPr id="14" name="TextBox 13"/>
-          <p:cNvSpPr txBox="1"/>
-          <p:nvPr/>
-        </p:nvSpPr>
-        <p:spPr>
-          <a:xfrm>
-            <a:off x="1893002" y="4031646"/>
-            <a:ext cx="2039544" cy="402336"/>
-          </a:xfrm>
-          <a:prstGeom prst="rect">
-            <a:avLst/>
-          </a:prstGeom>
-          <a:noFill/>
-        </p:spPr>
-        <p:txBody>
-          <a:bodyPr wrap="square" lIns="0" rIns="0" tIns="0" bIns="0" anchor="ctr">
-            <a:spAutoFit/>
-          </a:bodyPr>
-          <a:lstStyle/>
-          <a:p>
-            <a:pPr algn="ctr">
-              <a:lnSpc>
-                <a:spcPts val="1475"/>
-              </a:lnSpc>
-              <a:spcAft>
-                <a:spcPts val="0"/>
-              </a:spcAft>
-            </a:pPr>
-            <a:r>
-              <a:rPr sz="1250" b="1" i="0">
-                <a:solidFill>
-                  <a:srgbClr val="065A82"/>
-                </a:solidFill>
-                <a:latin typeface="Arial"/>
-              </a:rPr>
-              <a:t>контекстное окно</a:t>
-            </a:r>
-          </a:p>
-        </p:txBody>
-      </p:sp>
-      <p:sp>
-        <p:nvSpPr>
-          <p:cNvPr id="15" name="Rounded Rectangle 14"/>
-          <p:cNvSpPr/>
-          <p:nvPr/>
-        </p:nvSpPr>
-        <p:spPr>
-          <a:xfrm>
-            <a:off x="502920" y="4561998"/>
-            <a:ext cx="2356350" cy="402336"/>
-          </a:xfrm>
-          <a:prstGeom prst="roundRect">
-            <a:avLst>
-              <a:gd name="adj" fmla="val 25000"/>
-            </a:avLst>
-          </a:prstGeom>
-          <a:solidFill>
-            <a:srgbClr val="E0F1F2"/>
-          </a:solidFill>
-          <a:ln w="15240">
-            <a:solidFill>
-              <a:srgbClr val="028090"/>
-            </a:solidFill>
-          </a:ln>
-          <a:effectLst/>
-        </p:spPr>
-        <p:style>
-          <a:lnRef idx="1">
-            <a:schemeClr val="accent1"/>
-          </a:lnRef>
-          <a:fillRef idx="3">
-            <a:schemeClr val="accent1"/>
-          </a:fillRef>
-          <a:effectRef idx="2">
-            <a:schemeClr val="accent1"/>
-          </a:effectRef>
-          <a:fontRef idx="minor">
-            <a:schemeClr val="lt1"/>
-          </a:fontRef>
-        </p:style>
-        <p:txBody>
-          <a:bodyPr rtlCol="0" anchor="ctr"/>
-          <a:lstStyle/>
-          <a:p>
-            <a:pPr algn="ctr"/>
-          </a:p>
-        </p:txBody>
-      </p:sp>
-      <p:sp>
-        <p:nvSpPr>
-          <p:cNvPr id="16" name="TextBox 15"/>
-          <p:cNvSpPr txBox="1"/>
-          <p:nvPr/>
-        </p:nvSpPr>
-        <p:spPr>
-          <a:xfrm>
-            <a:off x="502920" y="4561998"/>
-            <a:ext cx="2356350" cy="402336"/>
-          </a:xfrm>
-          <a:prstGeom prst="rect">
-            <a:avLst/>
-          </a:prstGeom>
-          <a:noFill/>
-        </p:spPr>
-        <p:txBody>
-          <a:bodyPr wrap="square" lIns="0" rIns="0" tIns="0" bIns="0" anchor="ctr">
-            <a:spAutoFit/>
-          </a:bodyPr>
-          <a:lstStyle/>
-          <a:p>
-            <a:pPr algn="ctr">
-              <a:lnSpc>
-                <a:spcPts val="1475"/>
-              </a:lnSpc>
-              <a:spcAft>
-                <a:spcPts val="0"/>
-              </a:spcAft>
-            </a:pPr>
-            <a:r>
-              <a:rPr sz="1250" b="1" i="0">
-                <a:solidFill>
-                  <a:srgbClr val="065A82"/>
-                </a:solidFill>
-                <a:latin typeface="Arial"/>
-              </a:rPr>
-              <a:t>список инструментов</a:t>
-            </a:r>
-          </a:p>
-        </p:txBody>
-      </p:sp>
-      <p:sp>
-        <p:nvSpPr>
-          <p:cNvPr id="17" name="Rounded Rectangle 16"/>
-          <p:cNvSpPr/>
-          <p:nvPr/>
-        </p:nvSpPr>
-        <p:spPr>
-          <a:xfrm>
-            <a:off x="502920" y="5340572"/>
-            <a:ext cx="11183112" cy="881253"/>
-          </a:xfrm>
-          <a:prstGeom prst="roundRect">
-            <a:avLst>
-              <a:gd name="adj" fmla="val 25000"/>
-            </a:avLst>
-          </a:prstGeom>
-          <a:solidFill>
-            <a:srgbClr val="E0F1F2"/>
-          </a:solidFill>
-          <a:ln w="13970">
-            <a:solidFill>
-              <a:srgbClr val="028090"/>
-            </a:solidFill>
-          </a:ln>
-          <a:effectLst/>
-        </p:spPr>
-        <p:style>
-          <a:lnRef idx="1">
-            <a:schemeClr val="accent1"/>
-          </a:lnRef>
-          <a:fillRef idx="3">
-            <a:schemeClr val="accent1"/>
-          </a:fillRef>
-          <a:effectRef idx="2">
-            <a:schemeClr val="accent1"/>
-          </a:effectRef>
-          <a:fontRef idx="minor">
-            <a:schemeClr val="lt1"/>
-          </a:fontRef>
-        </p:style>
-        <p:txBody>
-          <a:bodyPr rtlCol="0" anchor="ctr"/>
-          <a:lstStyle/>
-          <a:p>
-            <a:pPr algn="ctr"/>
-          </a:p>
-        </p:txBody>
-      </p:sp>
-      <p:sp>
-        <p:nvSpPr>
-          <p:cNvPr id="18" name="Rounded Rectangle 17"/>
-          <p:cNvSpPr/>
-          <p:nvPr/>
-        </p:nvSpPr>
-        <p:spPr>
-          <a:xfrm>
-            <a:off x="521208" y="5395436"/>
-            <a:ext cx="64008" cy="771525"/>
-          </a:xfrm>
-          <a:prstGeom prst="roundRect">
-            <a:avLst>
-              <a:gd name="adj" fmla="val 50000"/>
-            </a:avLst>
-          </a:prstGeom>
-          <a:solidFill>
-            <a:srgbClr val="028090"/>
-          </a:solidFill>
-          <a:ln>
-            <a:noFill/>
-          </a:ln>
-          <a:effectLst/>
-        </p:spPr>
-        <p:style>
-          <a:lnRef idx="1">
-            <a:schemeClr val="accent1"/>
-          </a:lnRef>
-          <a:fillRef idx="3">
-            <a:schemeClr val="accent1"/>
-          </a:fillRef>
-          <a:effectRef idx="2">
-            <a:schemeClr val="accent1"/>
-          </a:effectRef>
-          <a:fontRef idx="minor">
-            <a:schemeClr val="lt1"/>
-          </a:fontRef>
-        </p:style>
-        <p:txBody>
-          <a:bodyPr rtlCol="0" anchor="ctr"/>
-          <a:lstStyle/>
-          <a:p>
-            <a:pPr algn="ctr"/>
-          </a:p>
-        </p:txBody>
-      </p:sp>
-      <p:sp>
-        <p:nvSpPr>
-          <p:cNvPr id="19" name="TextBox 18"/>
-          <p:cNvSpPr txBox="1"/>
-          <p:nvPr/>
-        </p:nvSpPr>
-        <p:spPr>
-          <a:xfrm>
-            <a:off x="804672" y="5477732"/>
-            <a:ext cx="10643616" cy="606933"/>
-          </a:xfrm>
-          <a:prstGeom prst="rect">
-            <a:avLst/>
-          </a:prstGeom>
-          <a:noFill/>
-        </p:spPr>
-        <p:txBody>
-          <a:bodyPr wrap="square" lIns="0" rIns="0" tIns="0" bIns="0" anchor="ctr">
-            <a:spAutoFit/>
-          </a:bodyPr>
-          <a:lstStyle/>
-          <a:p>
-            <a:pPr algn="l">
-              <a:lnSpc>
-                <a:spcPts val="1593"/>
-              </a:lnSpc>
-              <a:spcAft>
-                <a:spcPts val="300"/>
-              </a:spcAft>
-            </a:pPr>
-            <a:r>
-              <a:rPr sz="1350" b="0" i="0">
-                <a:solidFill>
-                  <a:srgbClr val="141B2E"/>
-                </a:solidFill>
-                <a:latin typeface="Arial"/>
-              </a:rPr>
-              <a:t>Переносимость, фактом: приём — отдельная роль со своим контекстным окном — есть у нескольких продуктов для работы с кодом. Запись расходится: где-то это markdown с инструкцией телом файла, у одного — формат с отдельным полем инструкции. Общей спецификации нет ни у одного.</a:t>
-            </a:r>
-          </a:p>
-        </p:txBody>
-      </p:sp>
-      <p:sp>
-        <p:nvSpPr>
-          <p:cNvPr id="20" name="TextBox 19"/>
+      </p:pic>
+      <p:sp>
+        <p:nvSpPr>
+          <p:cNvPr id="4" name="TextBox 3"/>
           <p:cNvSpPr txBox="1"/>
           <p:nvPr/>
         </p:nvSpPr>
@@ -4463,7 +3685,7 @@
                 </a:solidFill>
                 <a:latin typeface="Arial"/>
               </a:rPr>
-              <a:t>36</a:t>
+              <a:t>37</a:t>
             </a:r>
           </a:p>
         </p:txBody>
